--- a/Major Project (01CE0716) - PPT.pptx
+++ b/Major Project (01CE0716) - PPT.pptx
@@ -306,7 +306,7 @@
 <file path=ppt/revisionInfo.xml><?xml version="1.0" encoding="utf-8"?>
 <p1510:revInfo xmlns:a="http://schemas.openxmlformats.org/drawingml/2006/main" xmlns:r="http://schemas.openxmlformats.org/officeDocument/2006/relationships" xmlns:p1510="http://schemas.microsoft.com/office/powerpoint/2015/10/main">
   <p1510:revLst>
-    <p1510:client id="{2FE9B018-637A-460F-9492-DBACA6BEE86A}" v="9" dt="2026-07-27T10:54:37.543"/>
+    <p1510:client id="{D417D9FD-25E6-432D-9AFE-E4B3C77D9CAF}" v="2" dt="2026-08-19T12:12:26.635"/>
   </p1510:revLst>
 </p1510:revInfo>
 </file>
@@ -316,33 +316,33 @@
   <pc:docChgLst>
     <pc:chgData name="YASH TALAVIYA" userId="a0d1b88011941842" providerId="LiveId" clId="{BE3B889A-249B-4CFE-9086-8169842FF156}"/>
     <pc:docChg chg="undo redo custSel addSld delSld modSld sldOrd">
-      <pc:chgData name="YASH TALAVIYA" userId="a0d1b88011941842" providerId="LiveId" clId="{BE3B889A-249B-4CFE-9086-8169842FF156}" dt="2026-08-07T05:12:07.506" v="1576" actId="21"/>
+      <pc:chgData name="YASH TALAVIYA" userId="a0d1b88011941842" providerId="LiveId" clId="{BE3B889A-249B-4CFE-9086-8169842FF156}" dt="2026-08-19T12:10:50" v="1621" actId="20577"/>
       <pc:docMkLst>
         <pc:docMk/>
       </pc:docMkLst>
       <pc:sldChg chg="modSp mod">
-        <pc:chgData name="YASH TALAVIYA" userId="a0d1b88011941842" providerId="LiveId" clId="{BE3B889A-249B-4CFE-9086-8169842FF156}" dt="2026-07-08T10:24:14.529" v="1213" actId="20577"/>
+        <pc:chgData name="YASH TALAVIYA" userId="a0d1b88011941842" providerId="LiveId" clId="{BE3B889A-249B-4CFE-9086-8169842FF156}" dt="2026-08-19T10:18:00.068" v="1617" actId="313"/>
         <pc:sldMkLst>
           <pc:docMk/>
           <pc:sldMk cId="0" sldId="257"/>
         </pc:sldMkLst>
         <pc:spChg chg="mod">
-          <ac:chgData name="YASH TALAVIYA" userId="a0d1b88011941842" providerId="LiveId" clId="{BE3B889A-249B-4CFE-9086-8169842FF156}" dt="2026-07-08T10:24:14.529" v="1213" actId="20577"/>
+          <ac:chgData name="YASH TALAVIYA" userId="a0d1b88011941842" providerId="LiveId" clId="{BE3B889A-249B-4CFE-9086-8169842FF156}" dt="2026-08-19T10:18:00.068" v="1617" actId="313"/>
           <ac:spMkLst>
             <pc:docMk/>
             <pc:sldMk cId="0" sldId="257"/>
-            <ac:spMk id="89" creationId="{00000000-0000-0000-0000-000000000000}"/>
+            <ac:spMk id="93" creationId="{00000000-0000-0000-0000-000000000000}"/>
           </ac:spMkLst>
         </pc:spChg>
       </pc:sldChg>
       <pc:sldChg chg="modSp mod">
-        <pc:chgData name="YASH TALAVIYA" userId="a0d1b88011941842" providerId="LiveId" clId="{BE3B889A-249B-4CFE-9086-8169842FF156}" dt="2026-07-27T10:54:37.576" v="1563"/>
+        <pc:chgData name="YASH TALAVIYA" userId="a0d1b88011941842" providerId="LiveId" clId="{BE3B889A-249B-4CFE-9086-8169842FF156}" dt="2026-08-19T12:10:50" v="1621" actId="20577"/>
         <pc:sldMkLst>
           <pc:docMk/>
           <pc:sldMk cId="0" sldId="258"/>
         </pc:sldMkLst>
         <pc:spChg chg="mod">
-          <ac:chgData name="YASH TALAVIYA" userId="a0d1b88011941842" providerId="LiveId" clId="{BE3B889A-249B-4CFE-9086-8169842FF156}" dt="2026-07-27T10:54:37.576" v="1563"/>
+          <ac:chgData name="YASH TALAVIYA" userId="a0d1b88011941842" providerId="LiveId" clId="{BE3B889A-249B-4CFE-9086-8169842FF156}" dt="2026-08-19T12:10:50" v="1621" actId="20577"/>
           <ac:spMkLst>
             <pc:docMk/>
             <pc:sldMk cId="0" sldId="258"/>
@@ -365,101 +365,12 @@
           </ac:spMkLst>
         </pc:spChg>
       </pc:sldChg>
-      <pc:sldChg chg="modSp mod">
-        <pc:chgData name="YASH TALAVIYA" userId="a0d1b88011941842" providerId="LiveId" clId="{BE3B889A-249B-4CFE-9086-8169842FF156}" dt="2026-07-08T10:23:29.998" v="1203" actId="20577"/>
-        <pc:sldMkLst>
-          <pc:docMk/>
-          <pc:sldMk cId="0" sldId="260"/>
-        </pc:sldMkLst>
-        <pc:spChg chg="mod">
-          <ac:chgData name="YASH TALAVIYA" userId="a0d1b88011941842" providerId="LiveId" clId="{BE3B889A-249B-4CFE-9086-8169842FF156}" dt="2026-07-08T10:23:29.998" v="1203" actId="20577"/>
-          <ac:spMkLst>
-            <pc:docMk/>
-            <pc:sldMk cId="0" sldId="260"/>
-            <ac:spMk id="112" creationId="{00000000-0000-0000-0000-000000000000}"/>
-          </ac:spMkLst>
-        </pc:spChg>
-      </pc:sldChg>
       <pc:sldChg chg="addSp delSp modSp mod ord">
         <pc:chgData name="YASH TALAVIYA" userId="a0d1b88011941842" providerId="LiveId" clId="{BE3B889A-249B-4CFE-9086-8169842FF156}" dt="2026-07-27T10:54:11.356" v="1559"/>
         <pc:sldMkLst>
           <pc:docMk/>
           <pc:sldMk cId="0" sldId="267"/>
         </pc:sldMkLst>
-      </pc:sldChg>
-      <pc:sldChg chg="addSp delSp modSp mod ord">
-        <pc:chgData name="YASH TALAVIYA" userId="a0d1b88011941842" providerId="LiveId" clId="{BE3B889A-249B-4CFE-9086-8169842FF156}" dt="2026-07-08T10:22:17.744" v="1202"/>
-        <pc:sldMkLst>
-          <pc:docMk/>
-          <pc:sldMk cId="0" sldId="271"/>
-        </pc:sldMkLst>
-      </pc:sldChg>
-      <pc:sldChg chg="modSp mod">
-        <pc:chgData name="YASH TALAVIYA" userId="a0d1b88011941842" providerId="LiveId" clId="{BE3B889A-249B-4CFE-9086-8169842FF156}" dt="2026-07-08T10:25:52.408" v="1215" actId="21"/>
-        <pc:sldMkLst>
-          <pc:docMk/>
-          <pc:sldMk cId="0" sldId="275"/>
-        </pc:sldMkLst>
-        <pc:spChg chg="mod">
-          <ac:chgData name="YASH TALAVIYA" userId="a0d1b88011941842" providerId="LiveId" clId="{BE3B889A-249B-4CFE-9086-8169842FF156}" dt="2026-07-08T10:25:52.408" v="1215" actId="21"/>
-          <ac:spMkLst>
-            <pc:docMk/>
-            <pc:sldMk cId="0" sldId="275"/>
-            <ac:spMk id="204" creationId="{00000000-0000-0000-0000-000000000000}"/>
-          </ac:spMkLst>
-        </pc:spChg>
-      </pc:sldChg>
-      <pc:sldChg chg="addSp delSp modSp add mod ord">
-        <pc:chgData name="YASH TALAVIYA" userId="a0d1b88011941842" providerId="LiveId" clId="{BE3B889A-249B-4CFE-9086-8169842FF156}" dt="2026-07-08T10:22:13.956" v="1200"/>
-        <pc:sldMkLst>
-          <pc:docMk/>
-          <pc:sldMk cId="1961082806" sldId="281"/>
-        </pc:sldMkLst>
-      </pc:sldChg>
-      <pc:sldChg chg="modSp add mod">
-        <pc:chgData name="YASH TALAVIYA" userId="a0d1b88011941842" providerId="LiveId" clId="{BE3B889A-249B-4CFE-9086-8169842FF156}" dt="2026-07-08T10:26:15.900" v="1218" actId="21"/>
-        <pc:sldMkLst>
-          <pc:docMk/>
-          <pc:sldMk cId="860761560" sldId="285"/>
-        </pc:sldMkLst>
-        <pc:spChg chg="mod">
-          <ac:chgData name="YASH TALAVIYA" userId="a0d1b88011941842" providerId="LiveId" clId="{BE3B889A-249B-4CFE-9086-8169842FF156}" dt="2026-07-08T10:26:15.900" v="1218" actId="21"/>
-          <ac:spMkLst>
-            <pc:docMk/>
-            <pc:sldMk cId="860761560" sldId="285"/>
-            <ac:spMk id="204" creationId="{4E0C92F5-1343-4F6A-45B1-37A249F3A476}"/>
-          </ac:spMkLst>
-        </pc:spChg>
-      </pc:sldChg>
-      <pc:sldChg chg="modSp add mod">
-        <pc:chgData name="YASH TALAVIYA" userId="a0d1b88011941842" providerId="LiveId" clId="{BE3B889A-249B-4CFE-9086-8169842FF156}" dt="2026-07-08T10:27:20.983" v="1241" actId="21"/>
-        <pc:sldMkLst>
-          <pc:docMk/>
-          <pc:sldMk cId="2797183248" sldId="286"/>
-        </pc:sldMkLst>
-        <pc:spChg chg="mod">
-          <ac:chgData name="YASH TALAVIYA" userId="a0d1b88011941842" providerId="LiveId" clId="{BE3B889A-249B-4CFE-9086-8169842FF156}" dt="2026-07-08T10:27:20.983" v="1241" actId="21"/>
-          <ac:spMkLst>
-            <pc:docMk/>
-            <pc:sldMk cId="2797183248" sldId="286"/>
-            <ac:spMk id="204" creationId="{8B3D2E4B-1583-1B78-49B6-EDF423EB5C75}"/>
-          </ac:spMkLst>
-        </pc:spChg>
-      </pc:sldChg>
-      <pc:sldChg chg="modSp add">
-        <pc:chgData name="YASH TALAVIYA" userId="a0d1b88011941842" providerId="LiveId" clId="{BE3B889A-249B-4CFE-9086-8169842FF156}" dt="2026-07-08T10:27:28.861" v="1243"/>
-        <pc:sldMkLst>
-          <pc:docMk/>
-          <pc:sldMk cId="3446575831" sldId="292"/>
-        </pc:sldMkLst>
-        <pc:spChg chg="mod">
-          <ac:chgData name="YASH TALAVIYA" userId="a0d1b88011941842" providerId="LiveId" clId="{BE3B889A-249B-4CFE-9086-8169842FF156}" dt="2026-07-08T10:27:28.861" v="1243"/>
-          <ac:spMkLst>
-            <pc:docMk/>
-            <pc:sldMk cId="3446575831" sldId="292"/>
-            <ac:spMk id="204" creationId="{75884AFC-9F5C-9EBB-ED3F-AA9907C718D5}"/>
-          </ac:spMkLst>
-        </pc:spChg>
       </pc:sldChg>
       <pc:sldChg chg="modSp add mod">
         <pc:chgData name="YASH TALAVIYA" userId="a0d1b88011941842" providerId="LiveId" clId="{BE3B889A-249B-4CFE-9086-8169842FF156}" dt="2026-08-07T04:03:40.942" v="1574" actId="6549"/>
@@ -27782,7 +27693,7 @@
                 <a:cs typeface="Proxima Nova"/>
                 <a:sym typeface="Proxima Nova"/>
               </a:rPr>
-              <a:t>Review 1 </a:t>
+              <a:t>Viva &amp; Submission</a:t>
             </a:r>
             <a:br>
               <a:rPr lang="en-US" sz="2200" b="0" i="0" u="none" strike="noStrike" cap="none" dirty="0">
@@ -27805,31 +27716,7 @@
                 <a:cs typeface="Proxima Nova"/>
                 <a:sym typeface="Proxima Nova"/>
               </a:rPr>
-              <a:t>(</a:t>
-            </a:r>
-            <a:r>
-              <a:rPr lang="en-US" sz="2200" dirty="0">
-                <a:solidFill>
-                  <a:srgbClr val="04A2B9"/>
-                </a:solidFill>
-                <a:latin typeface="Proxima Nova"/>
-                <a:ea typeface="Proxima Nova"/>
-                <a:cs typeface="Proxima Nova"/>
-                <a:sym typeface="Proxima Nova"/>
-              </a:rPr>
-              <a:t>11</a:t>
-            </a:r>
-            <a:r>
-              <a:rPr lang="en-US" sz="2200" b="0" i="0" u="none" strike="noStrike" cap="none" dirty="0">
-                <a:solidFill>
-                  <a:srgbClr val="04A2B9"/>
-                </a:solidFill>
-                <a:latin typeface="Proxima Nova"/>
-                <a:ea typeface="Proxima Nova"/>
-                <a:cs typeface="Proxima Nova"/>
-                <a:sym typeface="Proxima Nova"/>
-              </a:rPr>
-              <a:t>/07/2026)</a:t>
+              <a:t>(22/08/2026)</a:t>
             </a:r>
             <a:br>
               <a:rPr lang="en-US" sz="2200" b="0" i="0" u="none" strike="noStrike" cap="none" dirty="0">
@@ -31831,7 +31718,19 @@
                 <a:cs typeface="Proxima Nova"/>
                 <a:sym typeface="Proxima Nova"/>
               </a:rPr>
-              <a:t>Summary Remarks of Review 1</a:t>
+              <a:t>Summary Remarks of </a:t>
+            </a:r>
+            <a:r>
+              <a:rPr lang="en-US" sz="1800" b="0" i="0" u="none" strike="noStrike" cap="none">
+                <a:solidFill>
+                  <a:srgbClr val="000000"/>
+                </a:solidFill>
+                <a:latin typeface="Proxima Nova"/>
+                <a:ea typeface="Proxima Nova"/>
+                <a:cs typeface="Proxima Nova"/>
+                <a:sym typeface="Proxima Nova"/>
+              </a:rPr>
+              <a:t>Review 1 &amp; 2</a:t>
             </a:r>
             <a:endParaRPr sz="1800" b="0" i="0" u="none" strike="noStrike" cap="none" dirty="0">
               <a:solidFill>
@@ -32999,7 +32898,7 @@
                 <a:cs typeface="Proxima Nova"/>
                 <a:sym typeface="Proxima Nova"/>
               </a:rPr>
-              <a:t>Summary Remarks of Review 1</a:t>
+              <a:t>Summary Remarks of Reviews</a:t>
             </a:r>
             <a:endParaRPr sz="2400" b="1" dirty="0">
               <a:latin typeface="Proxima Nova"/>
@@ -33025,7 +32924,7 @@
         <p:spPr>
           <a:xfrm>
             <a:off x="646157" y="1124750"/>
-            <a:ext cx="10890900" cy="1954351"/>
+            <a:ext cx="10890900" cy="4431952"/>
           </a:xfrm>
           <a:prstGeom prst="rect">
             <a:avLst/>
@@ -33125,19 +33024,10 @@
             </a:endParaRPr>
           </a:p>
           <a:p>
-            <a:pPr marR="0" lvl="0" algn="just" rtl="0">
+            <a:pPr lvl="0" algn="just">
               <a:lnSpc>
                 <a:spcPct val="115000"/>
               </a:lnSpc>
-              <a:spcBef>
-                <a:spcPts val="0"/>
-              </a:spcBef>
-              <a:spcAft>
-                <a:spcPts val="0"/>
-              </a:spcAft>
-              <a:buClr>
-                <a:srgbClr val="000000"/>
-              </a:buClr>
               <a:buSzPts val="1800"/>
             </a:pPr>
             <a:r>
@@ -33154,19 +33044,10 @@
             </a:r>
           </a:p>
           <a:p>
-            <a:pPr marR="0" lvl="0" algn="just" rtl="0">
+            <a:pPr lvl="0" algn="just">
               <a:lnSpc>
                 <a:spcPct val="115000"/>
               </a:lnSpc>
-              <a:spcBef>
-                <a:spcPts val="0"/>
-              </a:spcBef>
-              <a:spcAft>
-                <a:spcPts val="0"/>
-              </a:spcAft>
-              <a:buClr>
-                <a:srgbClr val="000000"/>
-              </a:buClr>
               <a:buSzPts val="1800"/>
             </a:pPr>
             <a:r>
@@ -33181,6 +33062,167 @@
               </a:rPr>
               <a:t>Written the research paper. and We will submit the research paper.</a:t>
             </a:r>
+            <a:r>
+              <a:rPr lang="en-US" sz="2000" b="1" dirty="0">
+                <a:solidFill>
+                  <a:schemeClr val="tx1"/>
+                </a:solidFill>
+                <a:latin typeface="Proxima Nova"/>
+                <a:ea typeface="Proxima Nova"/>
+                <a:cs typeface="Proxima Nova"/>
+                <a:sym typeface="Proxima Nova"/>
+              </a:rPr>
+              <a:t> </a:t>
+            </a:r>
+          </a:p>
+          <a:p>
+            <a:pPr marR="0" lvl="0" algn="just" rtl="0">
+              <a:lnSpc>
+                <a:spcPct val="115000"/>
+              </a:lnSpc>
+              <a:spcBef>
+                <a:spcPts val="0"/>
+              </a:spcBef>
+              <a:spcAft>
+                <a:spcPts val="0"/>
+              </a:spcAft>
+              <a:buClr>
+                <a:srgbClr val="000000"/>
+              </a:buClr>
+              <a:buSzPts val="1800"/>
+            </a:pPr>
+            <a:endParaRPr lang="en-US" sz="2000" b="0" i="0" u="none" strike="noStrike" cap="none" dirty="0">
+              <a:solidFill>
+                <a:schemeClr val="tx1"/>
+              </a:solidFill>
+              <a:latin typeface="Proxima Nova"/>
+              <a:ea typeface="Proxima Nova"/>
+              <a:cs typeface="Proxima Nova"/>
+              <a:sym typeface="Proxima Nova"/>
+            </a:endParaRPr>
+          </a:p>
+          <a:p>
+            <a:pPr lvl="0" algn="just">
+              <a:lnSpc>
+                <a:spcPct val="115000"/>
+              </a:lnSpc>
+              <a:buSzPts val="1800"/>
+            </a:pPr>
+            <a:r>
+              <a:rPr lang="en-US" sz="2000" b="1" dirty="0">
+                <a:solidFill>
+                  <a:schemeClr val="tx1"/>
+                </a:solidFill>
+                <a:latin typeface="Proxima Nova"/>
+                <a:ea typeface="Proxima Nova"/>
+                <a:cs typeface="Proxima Nova"/>
+                <a:sym typeface="Proxima Nova"/>
+              </a:rPr>
+              <a:t>Suggestions Given by Reviewers (Review 2):</a:t>
+            </a:r>
+          </a:p>
+          <a:p>
+            <a:pPr lvl="0" algn="just">
+              <a:lnSpc>
+                <a:spcPct val="115000"/>
+              </a:lnSpc>
+              <a:buSzPts val="1800"/>
+            </a:pPr>
+            <a:r>
+              <a:rPr lang="en-US" sz="2000" dirty="0">
+                <a:solidFill>
+                  <a:schemeClr val="tx1"/>
+                </a:solidFill>
+                <a:latin typeface="Proxima Nova"/>
+                <a:ea typeface="Proxima Nova"/>
+                <a:cs typeface="Proxima Nova"/>
+                <a:sym typeface="Proxima Nova"/>
+              </a:rPr>
+              <a:t>Submit the Research Paper.</a:t>
+            </a:r>
+          </a:p>
+          <a:p>
+            <a:pPr marR="0" lvl="0" algn="just" rtl="0">
+              <a:lnSpc>
+                <a:spcPct val="115000"/>
+              </a:lnSpc>
+              <a:spcBef>
+                <a:spcPts val="0"/>
+              </a:spcBef>
+              <a:spcAft>
+                <a:spcPts val="0"/>
+              </a:spcAft>
+              <a:buClr>
+                <a:srgbClr val="000000"/>
+              </a:buClr>
+              <a:buSzPts val="1800"/>
+            </a:pPr>
+            <a:endParaRPr lang="en-US" sz="2000" b="0" i="0" u="none" strike="noStrike" cap="none" dirty="0">
+              <a:solidFill>
+                <a:schemeClr val="tx1"/>
+              </a:solidFill>
+              <a:latin typeface="Proxima Nova"/>
+              <a:ea typeface="Proxima Nova"/>
+              <a:cs typeface="Proxima Nova"/>
+              <a:sym typeface="Proxima Nova"/>
+            </a:endParaRPr>
+          </a:p>
+          <a:p>
+            <a:pPr lvl="0" algn="just">
+              <a:lnSpc>
+                <a:spcPct val="115000"/>
+              </a:lnSpc>
+              <a:buSzPts val="1800"/>
+            </a:pPr>
+            <a:r>
+              <a:rPr lang="en-US" sz="2000" b="1" dirty="0">
+                <a:solidFill>
+                  <a:schemeClr val="tx1"/>
+                </a:solidFill>
+                <a:latin typeface="Proxima Nova"/>
+                <a:ea typeface="Proxima Nova"/>
+                <a:cs typeface="Proxima Nova"/>
+                <a:sym typeface="Proxima Nova"/>
+              </a:rPr>
+              <a:t>We Have Done:</a:t>
+            </a:r>
+          </a:p>
+          <a:p>
+            <a:pPr lvl="0" algn="just">
+              <a:lnSpc>
+                <a:spcPct val="115000"/>
+              </a:lnSpc>
+              <a:buSzPts val="1800"/>
+            </a:pPr>
+            <a:r>
+              <a:rPr lang="en-US" sz="2000" dirty="0">
+                <a:solidFill>
+                  <a:schemeClr val="tx1"/>
+                </a:solidFill>
+                <a:latin typeface="Proxima Nova"/>
+                <a:ea typeface="Proxima Nova"/>
+                <a:cs typeface="Proxima Nova"/>
+                <a:sym typeface="Proxima Nova"/>
+              </a:rPr>
+              <a:t>We have Submitted IPR in MU</a:t>
+            </a:r>
+          </a:p>
+          <a:p>
+            <a:pPr marR="0" lvl="0" algn="just" rtl="0">
+              <a:lnSpc>
+                <a:spcPct val="115000"/>
+              </a:lnSpc>
+              <a:spcBef>
+                <a:spcPts val="0"/>
+              </a:spcBef>
+              <a:spcAft>
+                <a:spcPts val="0"/>
+              </a:spcAft>
+              <a:buClr>
+                <a:srgbClr val="000000"/>
+              </a:buClr>
+              <a:buSzPts val="1800"/>
+            </a:pPr>
             <a:endParaRPr lang="en-US" sz="2000" b="0" i="0" u="none" strike="noStrike" cap="none" dirty="0">
               <a:solidFill>
                 <a:schemeClr val="tx1"/>
